--- a/Software Engineering Assignment/SE_Presentation.pptx
+++ b/Software Engineering Assignment/SE_Presentation.pptx
@@ -2369,8 +2369,8 @@
         </p:nvSpPr>
         <p:spPr>
           <a:xfrm>
-            <a:off x="4206240" y="2834640"/>
-            <a:ext cx="4572000" cy="365760"/>
+            <a:off x="4206240" y="2788920"/>
+            <a:ext cx="4572000" cy="292608"/>
           </a:xfrm>
           <a:prstGeom prst="rect">
             <a:avLst/>
@@ -2386,17 +2386,17 @@
               <a:buNone/>
             </a:pPr>
             <a:r>
-              <a:rPr lang="en-US" sz="1500" dirty="0">
-                <a:solidFill>
-                  <a:srgbClr val="6B7280"/>
-                </a:solidFill>
-                <a:latin typeface="Calibri" pitchFamily="34" charset="0"/>
-                <a:ea typeface="Calibri" pitchFamily="34" charset="-122"/>
-                <a:cs typeface="Calibri" pitchFamily="34" charset="-120"/>
-              </a:rPr>
-              <a:t>Student Name</a:t>
-            </a:r>
-            <a:endParaRPr lang="en-US" sz="1500" dirty="0"/>
+              <a:rPr lang="en-US" sz="1300" b="1" dirty="0">
+                <a:solidFill>
+                  <a:srgbClr val="2B4066"/>
+                </a:solidFill>
+                <a:latin typeface="Georgia" pitchFamily="34" charset="0"/>
+                <a:ea typeface="Georgia" pitchFamily="34" charset="-122"/>
+                <a:cs typeface="Georgia" pitchFamily="34" charset="-120"/>
+              </a:rPr>
+              <a:t>Group Members</a:t>
+            </a:r>
+            <a:endParaRPr lang="en-US" sz="1300" dirty="0"/>
           </a:p>
         </p:txBody>
       </p:sp>
@@ -2408,7 +2408,241 @@
         </p:nvSpPr>
         <p:spPr>
           <a:xfrm>
-            <a:off x="4206240" y="3246120"/>
+            <a:off x="4389120" y="3108960"/>
+            <a:ext cx="4297680" cy="256032"/>
+          </a:xfrm>
+          <a:prstGeom prst="rect">
+            <a:avLst/>
+          </a:prstGeom>
+          <a:noFill/>
+          <a:ln/>
+        </p:spPr>
+        <p:txBody>
+          <a:bodyPr wrap="square" rtlCol="0" anchor="ctr"/>
+          <a:lstStyle/>
+          <a:p>
+            <a:pPr indent="0" marL="0">
+              <a:buNone/>
+            </a:pPr>
+            <a:r>
+              <a:rPr lang="en-US" sz="1050" dirty="0">
+                <a:solidFill>
+                  <a:srgbClr val="1A1A2E"/>
+                </a:solidFill>
+                <a:latin typeface="Calibri" pitchFamily="34" charset="0"/>
+                <a:ea typeface="Calibri" pitchFamily="34" charset="-122"/>
+                <a:cs typeface="Calibri" pitchFamily="34" charset="-120"/>
+              </a:rPr>
+              <a:t>1.  Al-Aqmar Bin Qaid-E Johar (1121250326560)</a:t>
+            </a:r>
+            <a:endParaRPr lang="en-US" sz="1050" dirty="0"/>
+          </a:p>
+        </p:txBody>
+      </p:sp>
+      <p:sp>
+        <p:nvSpPr>
+          <p:cNvPr id="12" name="Text 10"/>
+          <p:cNvSpPr/>
+          <p:nvPr/>
+        </p:nvSpPr>
+        <p:spPr>
+          <a:xfrm>
+            <a:off x="4389120" y="3383280"/>
+            <a:ext cx="4297680" cy="256032"/>
+          </a:xfrm>
+          <a:prstGeom prst="rect">
+            <a:avLst/>
+          </a:prstGeom>
+          <a:noFill/>
+          <a:ln/>
+        </p:spPr>
+        <p:txBody>
+          <a:bodyPr wrap="square" rtlCol="0" anchor="ctr"/>
+          <a:lstStyle/>
+          <a:p>
+            <a:pPr indent="0" marL="0">
+              <a:buNone/>
+            </a:pPr>
+            <a:r>
+              <a:rPr lang="en-US" sz="1050" dirty="0">
+                <a:solidFill>
+                  <a:srgbClr val="1A1A2E"/>
+                </a:solidFill>
+                <a:latin typeface="Calibri" pitchFamily="34" charset="0"/>
+                <a:ea typeface="Calibri" pitchFamily="34" charset="-122"/>
+                <a:cs typeface="Calibri" pitchFamily="34" charset="-120"/>
+              </a:rPr>
+              <a:t>2.  Hashem Maged Ali Alhasani (0121250326706)</a:t>
+            </a:r>
+            <a:endParaRPr lang="en-US" sz="1050" dirty="0"/>
+          </a:p>
+        </p:txBody>
+      </p:sp>
+      <p:sp>
+        <p:nvSpPr>
+          <p:cNvPr id="13" name="Text 11"/>
+          <p:cNvSpPr/>
+          <p:nvPr/>
+        </p:nvSpPr>
+        <p:spPr>
+          <a:xfrm>
+            <a:off x="4389120" y="3657600"/>
+            <a:ext cx="4297680" cy="256032"/>
+          </a:xfrm>
+          <a:prstGeom prst="rect">
+            <a:avLst/>
+          </a:prstGeom>
+          <a:noFill/>
+          <a:ln/>
+        </p:spPr>
+        <p:txBody>
+          <a:bodyPr wrap="square" rtlCol="0" anchor="ctr"/>
+          <a:lstStyle/>
+          <a:p>
+            <a:pPr indent="0" marL="0">
+              <a:buNone/>
+            </a:pPr>
+            <a:r>
+              <a:rPr lang="en-US" sz="1050" dirty="0">
+                <a:solidFill>
+                  <a:srgbClr val="1A1A2E"/>
+                </a:solidFill>
+                <a:latin typeface="Calibri" pitchFamily="34" charset="0"/>
+                <a:ea typeface="Calibri" pitchFamily="34" charset="-122"/>
+                <a:cs typeface="Calibri" pitchFamily="34" charset="-120"/>
+              </a:rPr>
+              <a:t>3.  Sharjeel Muhammad (0121250326923)</a:t>
+            </a:r>
+            <a:endParaRPr lang="en-US" sz="1050" dirty="0"/>
+          </a:p>
+        </p:txBody>
+      </p:sp>
+      <p:sp>
+        <p:nvSpPr>
+          <p:cNvPr id="14" name="Text 12"/>
+          <p:cNvSpPr/>
+          <p:nvPr/>
+        </p:nvSpPr>
+        <p:spPr>
+          <a:xfrm>
+            <a:off x="4389120" y="3931920"/>
+            <a:ext cx="4297680" cy="256032"/>
+          </a:xfrm>
+          <a:prstGeom prst="rect">
+            <a:avLst/>
+          </a:prstGeom>
+          <a:noFill/>
+          <a:ln/>
+        </p:spPr>
+        <p:txBody>
+          <a:bodyPr wrap="square" rtlCol="0" anchor="ctr"/>
+          <a:lstStyle/>
+          <a:p>
+            <a:pPr indent="0" marL="0">
+              <a:buNone/>
+            </a:pPr>
+            <a:r>
+              <a:rPr lang="en-US" sz="1050" dirty="0">
+                <a:solidFill>
+                  <a:srgbClr val="1A1A2E"/>
+                </a:solidFill>
+                <a:latin typeface="Calibri" pitchFamily="34" charset="0"/>
+                <a:ea typeface="Calibri" pitchFamily="34" charset="-122"/>
+                <a:cs typeface="Calibri" pitchFamily="34" charset="-120"/>
+              </a:rPr>
+              <a:t>4.  Abdullah Saleh Abdullah (0121250326783)</a:t>
+            </a:r>
+            <a:endParaRPr lang="en-US" sz="1050" dirty="0"/>
+          </a:p>
+        </p:txBody>
+      </p:sp>
+      <p:sp>
+        <p:nvSpPr>
+          <p:cNvPr id="15" name="Text 13"/>
+          <p:cNvSpPr/>
+          <p:nvPr/>
+        </p:nvSpPr>
+        <p:spPr>
+          <a:xfrm>
+            <a:off x="4389120" y="4206240"/>
+            <a:ext cx="4297680" cy="256032"/>
+          </a:xfrm>
+          <a:prstGeom prst="rect">
+            <a:avLst/>
+          </a:prstGeom>
+          <a:noFill/>
+          <a:ln/>
+        </p:spPr>
+        <p:txBody>
+          <a:bodyPr wrap="square" rtlCol="0" anchor="ctr"/>
+          <a:lstStyle/>
+          <a:p>
+            <a:pPr indent="0" marL="0">
+              <a:buNone/>
+            </a:pPr>
+            <a:r>
+              <a:rPr lang="en-US" sz="1050" dirty="0">
+                <a:solidFill>
+                  <a:srgbClr val="1A1A2E"/>
+                </a:solidFill>
+                <a:latin typeface="Calibri" pitchFamily="34" charset="0"/>
+                <a:ea typeface="Calibri" pitchFamily="34" charset="-122"/>
+                <a:cs typeface="Calibri" pitchFamily="34" charset="-120"/>
+              </a:rPr>
+              <a:t>5.  Ateegalla Fadlalseed Ateegalla Ahmed (0121250326810)</a:t>
+            </a:r>
+            <a:endParaRPr lang="en-US" sz="1050" dirty="0"/>
+          </a:p>
+        </p:txBody>
+      </p:sp>
+      <p:sp>
+        <p:nvSpPr>
+          <p:cNvPr id="16" name="Text 14"/>
+          <p:cNvSpPr/>
+          <p:nvPr/>
+        </p:nvSpPr>
+        <p:spPr>
+          <a:xfrm>
+            <a:off x="4389120" y="4480560"/>
+            <a:ext cx="4297680" cy="256032"/>
+          </a:xfrm>
+          <a:prstGeom prst="rect">
+            <a:avLst/>
+          </a:prstGeom>
+          <a:noFill/>
+          <a:ln/>
+        </p:spPr>
+        <p:txBody>
+          <a:bodyPr wrap="square" rtlCol="0" anchor="ctr"/>
+          <a:lstStyle/>
+          <a:p>
+            <a:pPr indent="0" marL="0">
+              <a:buNone/>
+            </a:pPr>
+            <a:r>
+              <a:rPr lang="en-US" sz="1050" dirty="0">
+                <a:solidFill>
+                  <a:srgbClr val="1A1A2E"/>
+                </a:solidFill>
+                <a:latin typeface="Calibri" pitchFamily="34" charset="0"/>
+                <a:ea typeface="Calibri" pitchFamily="34" charset="-122"/>
+                <a:cs typeface="Calibri" pitchFamily="34" charset="-120"/>
+              </a:rPr>
+              <a:t>6.  Ibrahim Muhammad (0121250326708)</a:t>
+            </a:r>
+            <a:endParaRPr lang="en-US" sz="1050" dirty="0"/>
+          </a:p>
+        </p:txBody>
+      </p:sp>
+      <p:sp>
+        <p:nvSpPr>
+          <p:cNvPr id="17" name="Text 15"/>
+          <p:cNvSpPr/>
+          <p:nvPr/>
+        </p:nvSpPr>
+        <p:spPr>
+          <a:xfrm>
+            <a:off x="4206240" y="4846320"/>
             <a:ext cx="4572000" cy="365760"/>
           </a:xfrm>
           <a:prstGeom prst="rect">
